--- a/ProducerConsumerProjectPresentation.pptx
+++ b/ProducerConsumerProjectPresentation.pptx
@@ -10438,7 +10438,7 @@
                   <a:schemeClr val="bg1"/>
                 </a:solidFill>
               </a:rPr>
-              <a:t>Notification mechanism – first mutex</a:t>
+              <a:t>Notification mechanism</a:t>
             </a:r>
           </a:p>
         </p:txBody>
@@ -10607,7 +10607,7 @@
                 <a:latin typeface="Arial" panose="020B0604020202020204" pitchFamily="34" charset="0"/>
                 <a:ea typeface="Verdana" panose="020B0604030504040204" pitchFamily="34" charset="0"/>
               </a:rPr>
-              <a:t>lenght</a:t>
+              <a:t>length</a:t>
             </a:r>
             <a:r>
               <a:rPr lang="it-IT" dirty="0">
@@ -10936,7 +10936,7 @@
                 <a:latin typeface="Arial" panose="020B0604020202020204" pitchFamily="34" charset="0"/>
                 <a:ea typeface="Verdana" panose="020B0604030504040204" pitchFamily="34" charset="0"/>
               </a:rPr>
-              <a:t>The rate controller accesses to the production rate, </a:t>
+              <a:t>The rate controller accesses the production rate, </a:t>
             </a:r>
             <a:r>
               <a:rPr lang="it-IT" dirty="0" err="1">
@@ -11329,6 +11329,7 @@
               <a:rPr lang="it-IT" dirty="0" err="1">
                 <a:latin typeface="Arial" panose="020B0604020202020204" pitchFamily="34" charset="0"/>
                 <a:ea typeface="Verdana" panose="020B0604030504040204" pitchFamily="34" charset="0"/>
+                <a:cs typeface="Arial" panose="020B0604020202020204" pitchFamily="34" charset="0"/>
               </a:rPr>
               <a:t>It</a:t>
             </a:r>
@@ -11336,6 +11337,7 @@
               <a:rPr lang="it-IT" dirty="0">
                 <a:latin typeface="Arial" panose="020B0604020202020204" pitchFamily="34" charset="0"/>
                 <a:ea typeface="Verdana" panose="020B0604030504040204" pitchFamily="34" charset="0"/>
+                <a:cs typeface="Arial" panose="020B0604020202020204" pitchFamily="34" charset="0"/>
               </a:rPr>
               <a:t> </a:t>
             </a:r>
@@ -11343,6 +11345,7 @@
               <a:rPr lang="it-IT" dirty="0" err="1">
                 <a:latin typeface="Arial" panose="020B0604020202020204" pitchFamily="34" charset="0"/>
                 <a:ea typeface="Verdana" panose="020B0604030504040204" pitchFamily="34" charset="0"/>
+                <a:cs typeface="Arial" panose="020B0604020202020204" pitchFamily="34" charset="0"/>
               </a:rPr>
               <a:t>is</a:t>
             </a:r>
@@ -11350,6 +11353,7 @@
               <a:rPr lang="it-IT" dirty="0">
                 <a:latin typeface="Arial" panose="020B0604020202020204" pitchFamily="34" charset="0"/>
                 <a:ea typeface="Verdana" panose="020B0604030504040204" pitchFamily="34" charset="0"/>
+                <a:cs typeface="Arial" panose="020B0604020202020204" pitchFamily="34" charset="0"/>
               </a:rPr>
               <a:t> </a:t>
             </a:r>
@@ -11357,6 +11361,7 @@
               <a:rPr lang="it-IT" dirty="0" err="1">
                 <a:latin typeface="Arial" panose="020B0604020202020204" pitchFamily="34" charset="0"/>
                 <a:ea typeface="Verdana" panose="020B0604030504040204" pitchFamily="34" charset="0"/>
+                <a:cs typeface="Arial" panose="020B0604020202020204" pitchFamily="34" charset="0"/>
               </a:rPr>
               <a:t>different</a:t>
             </a:r>
@@ -11364,6 +11369,7 @@
               <a:rPr lang="it-IT" dirty="0">
                 <a:latin typeface="Arial" panose="020B0604020202020204" pitchFamily="34" charset="0"/>
                 <a:ea typeface="Verdana" panose="020B0604030504040204" pitchFamily="34" charset="0"/>
+                <a:cs typeface="Arial" panose="020B0604020202020204" pitchFamily="34" charset="0"/>
               </a:rPr>
               <a:t> from the first </a:t>
             </a:r>
@@ -11371,6 +11377,7 @@
               <a:rPr lang="it-IT" dirty="0" err="1">
                 <a:latin typeface="Arial" panose="020B0604020202020204" pitchFamily="34" charset="0"/>
                 <a:ea typeface="Verdana" panose="020B0604030504040204" pitchFamily="34" charset="0"/>
+                <a:cs typeface="Arial" panose="020B0604020202020204" pitchFamily="34" charset="0"/>
               </a:rPr>
               <a:t>mutex</a:t>
             </a:r>
@@ -11378,6 +11385,7 @@
               <a:rPr lang="it-IT" dirty="0">
                 <a:latin typeface="Arial" panose="020B0604020202020204" pitchFamily="34" charset="0"/>
                 <a:ea typeface="Verdana" panose="020B0604030504040204" pitchFamily="34" charset="0"/>
+                <a:cs typeface="Arial" panose="020B0604020202020204" pitchFamily="34" charset="0"/>
               </a:rPr>
               <a:t> </a:t>
             </a:r>
@@ -11385,6 +11393,7 @@
               <a:rPr lang="it-IT" dirty="0" err="1">
                 <a:latin typeface="Arial" panose="020B0604020202020204" pitchFamily="34" charset="0"/>
                 <a:ea typeface="Verdana" panose="020B0604030504040204" pitchFamily="34" charset="0"/>
+                <a:cs typeface="Arial" panose="020B0604020202020204" pitchFamily="34" charset="0"/>
               </a:rPr>
               <a:t>that</a:t>
             </a:r>
@@ -11392,6 +11401,7 @@
               <a:rPr lang="it-IT" dirty="0">
                 <a:latin typeface="Arial" panose="020B0604020202020204" pitchFamily="34" charset="0"/>
                 <a:ea typeface="Verdana" panose="020B0604030504040204" pitchFamily="34" charset="0"/>
+                <a:cs typeface="Arial" panose="020B0604020202020204" pitchFamily="34" charset="0"/>
               </a:rPr>
               <a:t> </a:t>
             </a:r>
@@ -11399,6 +11409,7 @@
               <a:rPr lang="it-IT" dirty="0" err="1">
                 <a:latin typeface="Arial" panose="020B0604020202020204" pitchFamily="34" charset="0"/>
                 <a:ea typeface="Verdana" panose="020B0604030504040204" pitchFamily="34" charset="0"/>
+                <a:cs typeface="Arial" panose="020B0604020202020204" pitchFamily="34" charset="0"/>
               </a:rPr>
               <a:t>has</a:t>
             </a:r>
@@ -11406,6 +11417,7 @@
               <a:rPr lang="it-IT" dirty="0">
                 <a:latin typeface="Arial" panose="020B0604020202020204" pitchFamily="34" charset="0"/>
                 <a:ea typeface="Verdana" panose="020B0604030504040204" pitchFamily="34" charset="0"/>
+                <a:cs typeface="Arial" panose="020B0604020202020204" pitchFamily="34" charset="0"/>
               </a:rPr>
               <a:t> </a:t>
             </a:r>
@@ -11413,6 +11425,7 @@
               <a:rPr lang="it-IT" dirty="0" err="1">
                 <a:latin typeface="Arial" panose="020B0604020202020204" pitchFamily="34" charset="0"/>
                 <a:ea typeface="Verdana" panose="020B0604030504040204" pitchFamily="34" charset="0"/>
+                <a:cs typeface="Arial" panose="020B0604020202020204" pitchFamily="34" charset="0"/>
               </a:rPr>
               <a:t>been</a:t>
             </a:r>
@@ -11420,6 +11433,7 @@
               <a:rPr lang="it-IT" dirty="0">
                 <a:latin typeface="Arial" panose="020B0604020202020204" pitchFamily="34" charset="0"/>
                 <a:ea typeface="Verdana" panose="020B0604030504040204" pitchFamily="34" charset="0"/>
+                <a:cs typeface="Arial" panose="020B0604020202020204" pitchFamily="34" charset="0"/>
               </a:rPr>
               <a:t> </a:t>
             </a:r>
@@ -11427,6 +11441,7 @@
               <a:rPr lang="it-IT" dirty="0" err="1">
                 <a:latin typeface="Arial" panose="020B0604020202020204" pitchFamily="34" charset="0"/>
                 <a:ea typeface="Verdana" panose="020B0604030504040204" pitchFamily="34" charset="0"/>
+                <a:cs typeface="Arial" panose="020B0604020202020204" pitchFamily="34" charset="0"/>
               </a:rPr>
               <a:t>used</a:t>
             </a:r>
@@ -11434,6 +11449,7 @@
               <a:rPr lang="it-IT" dirty="0">
                 <a:latin typeface="Arial" panose="020B0604020202020204" pitchFamily="34" charset="0"/>
                 <a:ea typeface="Verdana" panose="020B0604030504040204" pitchFamily="34" charset="0"/>
+                <a:cs typeface="Arial" panose="020B0604020202020204" pitchFamily="34" charset="0"/>
               </a:rPr>
               <a:t> </a:t>
             </a:r>
@@ -11441,6 +11457,7 @@
               <a:rPr lang="it-IT" dirty="0" err="1">
                 <a:latin typeface="Arial" panose="020B0604020202020204" pitchFamily="34" charset="0"/>
                 <a:ea typeface="Verdana" panose="020B0604030504040204" pitchFamily="34" charset="0"/>
+                <a:cs typeface="Arial" panose="020B0604020202020204" pitchFamily="34" charset="0"/>
               </a:rPr>
               <a:t>because</a:t>
             </a:r>
@@ -11448,20 +11465,185 @@
               <a:rPr lang="it-IT" dirty="0">
                 <a:latin typeface="Arial" panose="020B0604020202020204" pitchFamily="34" charset="0"/>
                 <a:ea typeface="Verdana" panose="020B0604030504040204" pitchFamily="34" charset="0"/>
+                <a:cs typeface="Arial" panose="020B0604020202020204" pitchFamily="34" charset="0"/>
               </a:rPr>
               <a:t> </a:t>
             </a:r>
             <a:r>
-              <a:rPr lang="en-US" dirty="0">
-                <a:latin typeface="Arial" panose="020B0604020202020204" pitchFamily="34" charset="0"/>
-                <a:ea typeface="Verdana" panose="020B0604030504040204" pitchFamily="34" charset="0"/>
-              </a:rPr>
-              <a:t>a program must be safe but also efficient so if there are two parts of code that can be executed in parallel it is better to do that</a:t>
-            </a:r>
-            <a:r>
-              <a:rPr lang="it-IT" dirty="0">
-                <a:latin typeface="Arial" panose="020B0604020202020204" pitchFamily="34" charset="0"/>
-                <a:ea typeface="Verdana" panose="020B0604030504040204" pitchFamily="34" charset="0"/>
+              <a:rPr lang="it-IT" dirty="0" err="1">
+                <a:latin typeface="Arial" panose="020B0604020202020204" pitchFamily="34" charset="0"/>
+                <a:ea typeface="Verdana" panose="020B0604030504040204" pitchFamily="34" charset="0"/>
+                <a:cs typeface="Arial" panose="020B0604020202020204" pitchFamily="34" charset="0"/>
+              </a:rPr>
+              <a:t>using</a:t>
+            </a:r>
+            <a:r>
+              <a:rPr lang="it-IT" dirty="0">
+                <a:latin typeface="Arial" panose="020B0604020202020204" pitchFamily="34" charset="0"/>
+                <a:ea typeface="Verdana" panose="020B0604030504040204" pitchFamily="34" charset="0"/>
+                <a:cs typeface="Arial" panose="020B0604020202020204" pitchFamily="34" charset="0"/>
+              </a:rPr>
+              <a:t> a</a:t>
+            </a:r>
+            <a:r>
+              <a:rPr lang="it-IT" dirty="0">
+                <a:latin typeface="Arial" panose="020B0604020202020204" pitchFamily="34" charset="0"/>
+                <a:cs typeface="Arial" panose="020B0604020202020204" pitchFamily="34" charset="0"/>
+              </a:rPr>
+              <a:t> single </a:t>
+            </a:r>
+            <a:r>
+              <a:rPr lang="it-IT" dirty="0" err="1">
+                <a:latin typeface="Arial" panose="020B0604020202020204" pitchFamily="34" charset="0"/>
+                <a:cs typeface="Arial" panose="020B0604020202020204" pitchFamily="34" charset="0"/>
+              </a:rPr>
+              <a:t>shared</a:t>
+            </a:r>
+            <a:r>
+              <a:rPr lang="it-IT" dirty="0">
+                <a:latin typeface="Arial" panose="020B0604020202020204" pitchFamily="34" charset="0"/>
+                <a:cs typeface="Arial" panose="020B0604020202020204" pitchFamily="34" charset="0"/>
+              </a:rPr>
+              <a:t> </a:t>
+            </a:r>
+            <a:r>
+              <a:rPr lang="it-IT" dirty="0" err="1">
+                <a:latin typeface="Arial" panose="020B0604020202020204" pitchFamily="34" charset="0"/>
+                <a:cs typeface="Arial" panose="020B0604020202020204" pitchFamily="34" charset="0"/>
+              </a:rPr>
+              <a:t>mutex</a:t>
+            </a:r>
+            <a:r>
+              <a:rPr lang="it-IT" dirty="0">
+                <a:latin typeface="Arial" panose="020B0604020202020204" pitchFamily="34" charset="0"/>
+                <a:cs typeface="Arial" panose="020B0604020202020204" pitchFamily="34" charset="0"/>
+              </a:rPr>
+              <a:t> for </a:t>
+            </a:r>
+            <a:r>
+              <a:rPr lang="it-IT" dirty="0" err="1">
+                <a:latin typeface="Arial" panose="020B0604020202020204" pitchFamily="34" charset="0"/>
+                <a:cs typeface="Arial" panose="020B0604020202020204" pitchFamily="34" charset="0"/>
+              </a:rPr>
+              <a:t>everything</a:t>
+            </a:r>
+            <a:r>
+              <a:rPr lang="it-IT" dirty="0">
+                <a:latin typeface="Arial" panose="020B0604020202020204" pitchFamily="34" charset="0"/>
+                <a:cs typeface="Arial" panose="020B0604020202020204" pitchFamily="34" charset="0"/>
+              </a:rPr>
+              <a:t> </a:t>
+            </a:r>
+            <a:r>
+              <a:rPr lang="it-IT" dirty="0" err="1">
+                <a:latin typeface="Arial" panose="020B0604020202020204" pitchFamily="34" charset="0"/>
+                <a:cs typeface="Arial" panose="020B0604020202020204" pitchFamily="34" charset="0"/>
+              </a:rPr>
+              <a:t>would</a:t>
+            </a:r>
+            <a:r>
+              <a:rPr lang="it-IT" dirty="0">
+                <a:latin typeface="Arial" panose="020B0604020202020204" pitchFamily="34" charset="0"/>
+                <a:cs typeface="Arial" panose="020B0604020202020204" pitchFamily="34" charset="0"/>
+              </a:rPr>
+              <a:t> </a:t>
+            </a:r>
+            <a:r>
+              <a:rPr lang="it-IT" dirty="0" err="1">
+                <a:latin typeface="Arial" panose="020B0604020202020204" pitchFamily="34" charset="0"/>
+                <a:cs typeface="Arial" panose="020B0604020202020204" pitchFamily="34" charset="0"/>
+              </a:rPr>
+              <a:t>have</a:t>
+            </a:r>
+            <a:r>
+              <a:rPr lang="it-IT" dirty="0">
+                <a:latin typeface="Arial" panose="020B0604020202020204" pitchFamily="34" charset="0"/>
+                <a:cs typeface="Arial" panose="020B0604020202020204" pitchFamily="34" charset="0"/>
+              </a:rPr>
+              <a:t> </a:t>
+            </a:r>
+            <a:r>
+              <a:rPr lang="it-IT" dirty="0" err="1">
+                <a:latin typeface="Arial" panose="020B0604020202020204" pitchFamily="34" charset="0"/>
+                <a:cs typeface="Arial" panose="020B0604020202020204" pitchFamily="34" charset="0"/>
+              </a:rPr>
+              <a:t>been</a:t>
+            </a:r>
+            <a:r>
+              <a:rPr lang="it-IT" dirty="0">
+                <a:latin typeface="Arial" panose="020B0604020202020204" pitchFamily="34" charset="0"/>
+                <a:cs typeface="Arial" panose="020B0604020202020204" pitchFamily="34" charset="0"/>
+              </a:rPr>
+              <a:t> </a:t>
+            </a:r>
+            <a:r>
+              <a:rPr lang="it-IT" dirty="0" err="1">
+                <a:latin typeface="Arial" panose="020B0604020202020204" pitchFamily="34" charset="0"/>
+                <a:cs typeface="Arial" panose="020B0604020202020204" pitchFamily="34" charset="0"/>
+              </a:rPr>
+              <a:t>simpler</a:t>
+            </a:r>
+            <a:r>
+              <a:rPr lang="it-IT" dirty="0">
+                <a:latin typeface="Arial" panose="020B0604020202020204" pitchFamily="34" charset="0"/>
+                <a:cs typeface="Arial" panose="020B0604020202020204" pitchFamily="34" charset="0"/>
+              </a:rPr>
+              <a:t>, </a:t>
+            </a:r>
+            <a:r>
+              <a:rPr lang="it-IT" dirty="0" err="1">
+                <a:latin typeface="Arial" panose="020B0604020202020204" pitchFamily="34" charset="0"/>
+                <a:cs typeface="Arial" panose="020B0604020202020204" pitchFamily="34" charset="0"/>
+              </a:rPr>
+              <a:t>but</a:t>
+            </a:r>
+            <a:r>
+              <a:rPr lang="it-IT" dirty="0">
+                <a:latin typeface="Arial" panose="020B0604020202020204" pitchFamily="34" charset="0"/>
+                <a:cs typeface="Arial" panose="020B0604020202020204" pitchFamily="34" charset="0"/>
+              </a:rPr>
+              <a:t> </a:t>
+            </a:r>
+            <a:r>
+              <a:rPr lang="it-IT" dirty="0" err="1">
+                <a:latin typeface="Arial" panose="020B0604020202020204" pitchFamily="34" charset="0"/>
+                <a:cs typeface="Arial" panose="020B0604020202020204" pitchFamily="34" charset="0"/>
+              </a:rPr>
+              <a:t>also</a:t>
+            </a:r>
+            <a:r>
+              <a:rPr lang="it-IT" dirty="0">
+                <a:latin typeface="Arial" panose="020B0604020202020204" pitchFamily="34" charset="0"/>
+                <a:cs typeface="Arial" panose="020B0604020202020204" pitchFamily="34" charset="0"/>
+              </a:rPr>
+              <a:t> </a:t>
+            </a:r>
+            <a:r>
+              <a:rPr lang="it-IT" dirty="0" err="1">
+                <a:latin typeface="Arial" panose="020B0604020202020204" pitchFamily="34" charset="0"/>
+                <a:cs typeface="Arial" panose="020B0604020202020204" pitchFamily="34" charset="0"/>
+              </a:rPr>
+              <a:t>less</a:t>
+            </a:r>
+            <a:r>
+              <a:rPr lang="it-IT" dirty="0">
+                <a:latin typeface="Arial" panose="020B0604020202020204" pitchFamily="34" charset="0"/>
+                <a:cs typeface="Arial" panose="020B0604020202020204" pitchFamily="34" charset="0"/>
+              </a:rPr>
+              <a:t> </a:t>
+            </a:r>
+            <a:r>
+              <a:rPr lang="it-IT" dirty="0" err="1">
+                <a:latin typeface="Arial" panose="020B0604020202020204" pitchFamily="34" charset="0"/>
+                <a:cs typeface="Arial" panose="020B0604020202020204" pitchFamily="34" charset="0"/>
+              </a:rPr>
+              <a:t>efficient</a:t>
+            </a:r>
+            <a:r>
+              <a:rPr lang="it-IT" dirty="0">
+                <a:latin typeface="Arial" panose="020B0604020202020204" pitchFamily="34" charset="0"/>
+                <a:ea typeface="Verdana" panose="020B0604030504040204" pitchFamily="34" charset="0"/>
+                <a:cs typeface="Arial" panose="020B0604020202020204" pitchFamily="34" charset="0"/>
               </a:rPr>
               <a:t>.</a:t>
             </a:r>
@@ -11482,105 +11664,165 @@
               <a:buChar char="•"/>
             </a:pPr>
             <a:r>
-              <a:rPr lang="it-IT" dirty="0">
-                <a:latin typeface="Arial" panose="020B0604020202020204" pitchFamily="34" charset="0"/>
-                <a:ea typeface="Verdana" panose="020B0604030504040204" pitchFamily="34" charset="0"/>
-              </a:rPr>
-              <a:t>In the </a:t>
-            </a:r>
-            <a:r>
-              <a:rPr lang="it-IT" dirty="0" err="1">
-                <a:latin typeface="Arial" panose="020B0604020202020204" pitchFamily="34" charset="0"/>
-                <a:ea typeface="Verdana" panose="020B0604030504040204" pitchFamily="34" charset="0"/>
-              </a:rPr>
-              <a:t>program</a:t>
-            </a:r>
-            <a:r>
-              <a:rPr lang="it-IT" dirty="0">
-                <a:latin typeface="Arial" panose="020B0604020202020204" pitchFamily="34" charset="0"/>
-                <a:ea typeface="Verdana" panose="020B0604030504040204" pitchFamily="34" charset="0"/>
+              <a:rPr lang="it-IT" dirty="0" err="1">
+                <a:latin typeface="Arial" panose="020B0604020202020204" pitchFamily="34" charset="0"/>
+                <a:ea typeface="Verdana" panose="020B0604030504040204" pitchFamily="34" charset="0"/>
+                <a:cs typeface="Arial" panose="020B0604020202020204" pitchFamily="34" charset="0"/>
+              </a:rPr>
+              <a:t>Indeed</a:t>
+            </a:r>
+            <a:r>
+              <a:rPr lang="it-IT" dirty="0">
+                <a:latin typeface="Arial" panose="020B0604020202020204" pitchFamily="34" charset="0"/>
+                <a:ea typeface="Verdana" panose="020B0604030504040204" pitchFamily="34" charset="0"/>
+                <a:cs typeface="Arial" panose="020B0604020202020204" pitchFamily="34" charset="0"/>
               </a:rPr>
               <a:t> </a:t>
             </a:r>
             <a:r>
               <a:rPr lang="it-IT" dirty="0" err="1">
                 <a:latin typeface="Arial" panose="020B0604020202020204" pitchFamily="34" charset="0"/>
-                <a:ea typeface="Verdana" panose="020B0604030504040204" pitchFamily="34" charset="0"/>
-              </a:rPr>
-              <a:t>this</a:t>
-            </a:r>
-            <a:r>
-              <a:rPr lang="it-IT" dirty="0">
-                <a:latin typeface="Arial" panose="020B0604020202020204" pitchFamily="34" charset="0"/>
-                <a:ea typeface="Verdana" panose="020B0604030504040204" pitchFamily="34" charset="0"/>
+                <a:cs typeface="Arial" panose="020B0604020202020204" pitchFamily="34" charset="0"/>
+              </a:rPr>
+              <a:t>two</a:t>
+            </a:r>
+            <a:r>
+              <a:rPr lang="it-IT" dirty="0">
+                <a:latin typeface="Arial" panose="020B0604020202020204" pitchFamily="34" charset="0"/>
+                <a:cs typeface="Arial" panose="020B0604020202020204" pitchFamily="34" charset="0"/>
+              </a:rPr>
+              <a:t> separate </a:t>
+            </a:r>
+            <a:r>
+              <a:rPr lang="it-IT" dirty="0" err="1">
+                <a:latin typeface="Arial" panose="020B0604020202020204" pitchFamily="34" charset="0"/>
+                <a:cs typeface="Arial" panose="020B0604020202020204" pitchFamily="34" charset="0"/>
+              </a:rPr>
+              <a:t>mutexes</a:t>
+            </a:r>
+            <a:r>
+              <a:rPr lang="it-IT" dirty="0">
+                <a:latin typeface="Arial" panose="020B0604020202020204" pitchFamily="34" charset="0"/>
+                <a:cs typeface="Arial" panose="020B0604020202020204" pitchFamily="34" charset="0"/>
               </a:rPr>
               <a:t> </a:t>
             </a:r>
             <a:r>
               <a:rPr lang="it-IT" dirty="0" err="1">
                 <a:latin typeface="Arial" panose="020B0604020202020204" pitchFamily="34" charset="0"/>
-                <a:ea typeface="Verdana" panose="020B0604030504040204" pitchFamily="34" charset="0"/>
-              </a:rPr>
-              <a:t>applies</a:t>
-            </a:r>
-            <a:r>
-              <a:rPr lang="it-IT" dirty="0">
-                <a:latin typeface="Arial" panose="020B0604020202020204" pitchFamily="34" charset="0"/>
-                <a:ea typeface="Verdana" panose="020B0604030504040204" pitchFamily="34" charset="0"/>
-              </a:rPr>
-              <a:t> to the rate controller and the consumer </a:t>
-            </a:r>
-            <a:r>
-              <a:rPr lang="it-IT" dirty="0" err="1">
-                <a:latin typeface="Arial" panose="020B0604020202020204" pitchFamily="34" charset="0"/>
-                <a:ea typeface="Verdana" panose="020B0604030504040204" pitchFamily="34" charset="0"/>
-              </a:rPr>
-              <a:t>that</a:t>
-            </a:r>
-            <a:r>
-              <a:rPr lang="it-IT" dirty="0">
-                <a:latin typeface="Arial" panose="020B0604020202020204" pitchFamily="34" charset="0"/>
-                <a:ea typeface="Verdana" panose="020B0604030504040204" pitchFamily="34" charset="0"/>
-              </a:rPr>
-              <a:t> can be </a:t>
-            </a:r>
-            <a:r>
-              <a:rPr lang="it-IT" dirty="0" err="1">
-                <a:latin typeface="Arial" panose="020B0604020202020204" pitchFamily="34" charset="0"/>
-                <a:ea typeface="Verdana" panose="020B0604030504040204" pitchFamily="34" charset="0"/>
-              </a:rPr>
-              <a:t>executed</a:t>
-            </a:r>
-            <a:r>
-              <a:rPr lang="it-IT" dirty="0">
-                <a:latin typeface="Arial" panose="020B0604020202020204" pitchFamily="34" charset="0"/>
-                <a:ea typeface="Verdana" panose="020B0604030504040204" pitchFamily="34" charset="0"/>
+                <a:cs typeface="Arial" panose="020B0604020202020204" pitchFamily="34" charset="0"/>
+              </a:rPr>
+              <a:t>allows</a:t>
+            </a:r>
+            <a:r>
+              <a:rPr lang="it-IT" dirty="0">
+                <a:latin typeface="Arial" panose="020B0604020202020204" pitchFamily="34" charset="0"/>
+                <a:cs typeface="Arial" panose="020B0604020202020204" pitchFamily="34" charset="0"/>
+              </a:rPr>
+              <a:t> the consumer and the rate controller to </a:t>
+            </a:r>
+            <a:r>
+              <a:rPr lang="it-IT" dirty="0" err="1">
+                <a:latin typeface="Arial" panose="020B0604020202020204" pitchFamily="34" charset="0"/>
+                <a:cs typeface="Arial" panose="020B0604020202020204" pitchFamily="34" charset="0"/>
+              </a:rPr>
+              <a:t>run</a:t>
+            </a:r>
+            <a:r>
+              <a:rPr lang="it-IT" dirty="0">
+                <a:latin typeface="Arial" panose="020B0604020202020204" pitchFamily="34" charset="0"/>
+                <a:cs typeface="Arial" panose="020B0604020202020204" pitchFamily="34" charset="0"/>
               </a:rPr>
               <a:t> in </a:t>
             </a:r>
             <a:r>
               <a:rPr lang="it-IT" dirty="0" err="1">
                 <a:latin typeface="Arial" panose="020B0604020202020204" pitchFamily="34" charset="0"/>
-                <a:ea typeface="Verdana" panose="020B0604030504040204" pitchFamily="34" charset="0"/>
+                <a:cs typeface="Arial" panose="020B0604020202020204" pitchFamily="34" charset="0"/>
               </a:rPr>
               <a:t>parallel</a:t>
             </a:r>
             <a:r>
               <a:rPr lang="it-IT" dirty="0">
                 <a:latin typeface="Arial" panose="020B0604020202020204" pitchFamily="34" charset="0"/>
-                <a:ea typeface="Verdana" panose="020B0604030504040204" pitchFamily="34" charset="0"/>
+                <a:cs typeface="Arial" panose="020B0604020202020204" pitchFamily="34" charset="0"/>
+              </a:rPr>
+              <a:t>, </a:t>
+            </a:r>
+            <a:r>
+              <a:rPr lang="it-IT" dirty="0" err="1">
+                <a:latin typeface="Arial" panose="020B0604020202020204" pitchFamily="34" charset="0"/>
+                <a:cs typeface="Arial" panose="020B0604020202020204" pitchFamily="34" charset="0"/>
+              </a:rPr>
+              <a:t>improving</a:t>
+            </a:r>
+            <a:r>
+              <a:rPr lang="it-IT" dirty="0">
+                <a:latin typeface="Arial" panose="020B0604020202020204" pitchFamily="34" charset="0"/>
+                <a:cs typeface="Arial" panose="020B0604020202020204" pitchFamily="34" charset="0"/>
+              </a:rPr>
+              <a:t> </a:t>
+            </a:r>
+            <a:r>
+              <a:rPr lang="it-IT" dirty="0" err="1">
+                <a:latin typeface="Arial" panose="020B0604020202020204" pitchFamily="34" charset="0"/>
+                <a:cs typeface="Arial" panose="020B0604020202020204" pitchFamily="34" charset="0"/>
+              </a:rPr>
+              <a:t>efficiency</a:t>
+            </a:r>
+            <a:r>
+              <a:rPr lang="it-IT" dirty="0">
+                <a:latin typeface="Arial" panose="020B0604020202020204" pitchFamily="34" charset="0"/>
+                <a:cs typeface="Arial" panose="020B0604020202020204" pitchFamily="34" charset="0"/>
+              </a:rPr>
+              <a:t> </a:t>
+            </a:r>
+            <a:r>
+              <a:rPr lang="it-IT" dirty="0" err="1">
+                <a:latin typeface="Arial" panose="020B0604020202020204" pitchFamily="34" charset="0"/>
+                <a:cs typeface="Arial" panose="020B0604020202020204" pitchFamily="34" charset="0"/>
+              </a:rPr>
+              <a:t>without</a:t>
+            </a:r>
+            <a:r>
+              <a:rPr lang="it-IT" dirty="0">
+                <a:latin typeface="Arial" panose="020B0604020202020204" pitchFamily="34" charset="0"/>
+                <a:cs typeface="Arial" panose="020B0604020202020204" pitchFamily="34" charset="0"/>
+              </a:rPr>
+              <a:t> </a:t>
+            </a:r>
+            <a:r>
+              <a:rPr lang="it-IT" dirty="0" err="1">
+                <a:latin typeface="Arial" panose="020B0604020202020204" pitchFamily="34" charset="0"/>
+                <a:cs typeface="Arial" panose="020B0604020202020204" pitchFamily="34" charset="0"/>
+              </a:rPr>
+              <a:t>sacrificing</a:t>
+            </a:r>
+            <a:r>
+              <a:rPr lang="it-IT" dirty="0">
+                <a:latin typeface="Arial" panose="020B0604020202020204" pitchFamily="34" charset="0"/>
+                <a:cs typeface="Arial" panose="020B0604020202020204" pitchFamily="34" charset="0"/>
+              </a:rPr>
+              <a:t> </a:t>
+            </a:r>
+            <a:r>
+              <a:rPr lang="it-IT" dirty="0" err="1">
+                <a:latin typeface="Arial" panose="020B0604020202020204" pitchFamily="34" charset="0"/>
+                <a:cs typeface="Arial" panose="020B0604020202020204" pitchFamily="34" charset="0"/>
+              </a:rPr>
+              <a:t>correctness</a:t>
+            </a:r>
+            <a:r>
+              <a:rPr lang="it-IT" dirty="0">
+                <a:latin typeface="Arial" panose="020B0604020202020204" pitchFamily="34" charset="0"/>
+                <a:cs typeface="Arial" panose="020B0604020202020204" pitchFamily="34" charset="0"/>
               </a:rPr>
               <a:t>.</a:t>
             </a:r>
-          </a:p>
-          <a:p>
-            <a:pPr marL="457200" indent="-457200">
-              <a:buFont typeface="Arial" panose="020B0604020202020204" pitchFamily="34" charset="0"/>
-              <a:buChar char="•"/>
-            </a:pPr>
-            <a:endParaRPr lang="it-IT" sz="3200" dirty="0">
+            <a:endParaRPr lang="it-IT" dirty="0">
               <a:latin typeface="Arial" panose="020B0604020202020204" pitchFamily="34" charset="0"/>
               <a:ea typeface="Verdana" panose="020B0604030504040204" pitchFamily="34" charset="0"/>
+              <a:cs typeface="Arial" panose="020B0604020202020204" pitchFamily="34" charset="0"/>
             </a:endParaRPr>
           </a:p>
         </p:txBody>
@@ -12078,7 +12320,7 @@
                 <a:latin typeface="Arial" panose="020B0604020202020204" pitchFamily="34" charset="0"/>
                 <a:ea typeface="Verdana" panose="020B0604030504040204" pitchFamily="34" charset="0"/>
               </a:rPr>
-              <a:t>legth</a:t>
+              <a:t>length</a:t>
             </a:r>
             <a:r>
               <a:rPr lang="it-IT" dirty="0">
